--- a/docs/research/mediscope-final-presentation.pptx
+++ b/docs/research/mediscope-final-presentation.pptx
@@ -4561,7 +4561,7 @@
       </p:sp>
       <p:pic>
         <p:nvPicPr>
-          <p:cNvPr id="6" name="그림 5"/>
+          <p:cNvPr id="5" name="그림 4"/>
           <p:cNvPicPr>
             <a:picLocks noChangeAspect="1"/>
           </p:cNvPicPr>
@@ -4581,8 +4581,8 @@
         </p:blipFill>
         <p:spPr>
           <a:xfrm>
-            <a:off x="777240" y="886969"/>
-            <a:ext cx="7809452" cy="4256531"/>
+            <a:off x="788416" y="886969"/>
+            <a:ext cx="7567167" cy="4256531"/>
           </a:xfrm>
           <a:prstGeom prst="rect">
             <a:avLst/>
